--- a/dist/초1/수학/몇째와짝수홀수/초1_수학_몇째와짝수홀수_01_몇째인지알기.pptx
+++ b/dist/초1/수학/몇째와짝수홀수/초1_수학_몇째와짝수홀수_01_몇째인지알기.pptx
@@ -120,13 +120,13 @@
   <p:extLst>
     <p:ext uri="{521415D9-36F7-43E2-AB2F-B90AF26B5E84}">
       <p14:sectionLst xmlns:p14="http://schemas.microsoft.com/office/powerpoint/2010/main">
-        <p14:section name="도입" id="{79ceac4f-5db9-8258-0b80-1694ad1254e3}">
+        <p14:section name="도입" id="{151ab7ca-7187-519a-0297-75e90e7672a8}">
           <p14:sldIdLst>
             <p14:sldId id="256"/>
             <p14:sldId id="257"/>
           </p14:sldIdLst>
         </p14:section>
-        <p14:section name="개념" id="{c8c5a6aa-7ab5-6814-952b-682be0e5858b}">
+        <p14:section name="개념" id="{52e064e0-4668-bded-8e81-be9c96db0832}">
           <p14:sldIdLst>
             <p14:sldId id="258"/>
             <p14:sldId id="259"/>
@@ -134,26 +134,26 @@
             <p14:sldId id="261"/>
           </p14:sldIdLst>
         </p14:section>
-        <p14:section name="연습" id="{c9116762-8180-1718-b866-e964e4b59c41}">
+        <p14:section name="연습" id="{f50d9173-7bb8-2d59-1a88-54cdba385d29}">
           <p14:sldIdLst>
             <p14:sldId id="262"/>
             <p14:sldId id="263"/>
             <p14:sldId id="264"/>
           </p14:sldIdLst>
         </p14:section>
-        <p14:section name="확인" id="{3fb56c75-2e67-2eea-3804-13f3d5262d17}">
+        <p14:section name="확인" id="{de9a36f3-5085-149c-596f-9e3ba691b920}">
           <p14:sldIdLst>
             <p14:sldId id="265"/>
             <p14:sldId id="266"/>
             <p14:sldId id="267"/>
           </p14:sldIdLst>
         </p14:section>
-        <p14:section name="정리" id="{3fc750be-841c-2b58-8ba1-e0d8d0c4b39d}">
+        <p14:section name="정리" id="{70dabd5b-aad4-3c13-f0d7-a005d47b2769}">
           <p14:sldIdLst>
             <p14:sldId id="268"/>
           </p14:sldIdLst>
         </p14:section>
-        <p14:section name="보충" id="{1085521e-ff71-293e-8701-64037062f703}">
+        <p14:section name="보충" id="{f7a78e77-b150-e922-3f22-437efb34664e}">
           <p14:sldIdLst>
             <p14:sldId id="269"/>
           </p14:sldIdLst>

--- a/dist/초1/수학/몇째와짝수홀수/초1_수학_몇째와짝수홀수_01_몇째인지알기.pptx
+++ b/dist/초1/수학/몇째와짝수홀수/초1_수학_몇째와짝수홀수_01_몇째인지알기.pptx
@@ -120,13 +120,13 @@
   <p:extLst>
     <p:ext uri="{521415D9-36F7-43E2-AB2F-B90AF26B5E84}">
       <p14:sectionLst xmlns:p14="http://schemas.microsoft.com/office/powerpoint/2010/main">
-        <p14:section name="도입" id="{151ab7ca-7187-519a-0297-75e90e7672a8}">
+        <p14:section name="도입" id="{0cdf4138-1115-9a6e-0a21-0d276d084aad}">
           <p14:sldIdLst>
             <p14:sldId id="256"/>
             <p14:sldId id="257"/>
           </p14:sldIdLst>
         </p14:section>
-        <p14:section name="개념" id="{52e064e0-4668-bded-8e81-be9c96db0832}">
+        <p14:section name="개념" id="{4eb17131-247b-a709-fd84-c88a66cdb63a}">
           <p14:sldIdLst>
             <p14:sldId id="258"/>
             <p14:sldId id="259"/>
@@ -134,26 +134,26 @@
             <p14:sldId id="261"/>
           </p14:sldIdLst>
         </p14:section>
-        <p14:section name="연습" id="{f50d9173-7bb8-2d59-1a88-54cdba385d29}">
+        <p14:section name="연습" id="{613b8738-ad5c-9a2a-cc1f-87866188ec6d}">
           <p14:sldIdLst>
             <p14:sldId id="262"/>
             <p14:sldId id="263"/>
             <p14:sldId id="264"/>
           </p14:sldIdLst>
         </p14:section>
-        <p14:section name="확인" id="{de9a36f3-5085-149c-596f-9e3ba691b920}">
+        <p14:section name="확인" id="{1f2de925-a9db-8f2b-5c3b-a853af3e3c20}">
           <p14:sldIdLst>
             <p14:sldId id="265"/>
             <p14:sldId id="266"/>
             <p14:sldId id="267"/>
           </p14:sldIdLst>
         </p14:section>
-        <p14:section name="정리" id="{70dabd5b-aad4-3c13-f0d7-a005d47b2769}">
+        <p14:section name="정리" id="{956d0944-c58c-a62a-b5f7-e040c1b4c097}">
           <p14:sldIdLst>
             <p14:sldId id="268"/>
           </p14:sldIdLst>
         </p14:section>
-        <p14:section name="보충" id="{f7a78e77-b150-e922-3f22-437efb34664e}">
+        <p14:section name="보충" id="{71525e71-9f61-b1a6-b43f-58d54c1a14f4}">
           <p14:sldIdLst>
             <p14:sldId id="269"/>
           </p14:sldIdLst>

--- a/dist/초1/수학/몇째와짝수홀수/초1_수학_몇째와짝수홀수_01_몇째인지알기.pptx
+++ b/dist/초1/수학/몇째와짝수홀수/초1_수학_몇째와짝수홀수_01_몇째인지알기.pptx
@@ -120,13 +120,13 @@
   <p:extLst>
     <p:ext uri="{521415D9-36F7-43E2-AB2F-B90AF26B5E84}">
       <p14:sectionLst xmlns:p14="http://schemas.microsoft.com/office/powerpoint/2010/main">
-        <p14:section name="도입" id="{0cdf4138-1115-9a6e-0a21-0d276d084aad}">
+        <p14:section name="도입" id="{f6473a78-ee2e-b82d-abb8-9171432e75d5}">
           <p14:sldIdLst>
             <p14:sldId id="256"/>
             <p14:sldId id="257"/>
           </p14:sldIdLst>
         </p14:section>
-        <p14:section name="개념" id="{4eb17131-247b-a709-fd84-c88a66cdb63a}">
+        <p14:section name="개념" id="{4b7e0a27-1cf1-543d-7996-78fea3cd1823}">
           <p14:sldIdLst>
             <p14:sldId id="258"/>
             <p14:sldId id="259"/>
@@ -134,26 +134,26 @@
             <p14:sldId id="261"/>
           </p14:sldIdLst>
         </p14:section>
-        <p14:section name="연습" id="{613b8738-ad5c-9a2a-cc1f-87866188ec6d}">
+        <p14:section name="연습" id="{5093e45b-6c9c-0f03-459a-fb277a199043}">
           <p14:sldIdLst>
             <p14:sldId id="262"/>
             <p14:sldId id="263"/>
             <p14:sldId id="264"/>
           </p14:sldIdLst>
         </p14:section>
-        <p14:section name="확인" id="{1f2de925-a9db-8f2b-5c3b-a853af3e3c20}">
+        <p14:section name="확인" id="{63215bff-ea35-4e2b-a616-89e57faa0ef6}">
           <p14:sldIdLst>
             <p14:sldId id="265"/>
             <p14:sldId id="266"/>
             <p14:sldId id="267"/>
           </p14:sldIdLst>
         </p14:section>
-        <p14:section name="정리" id="{956d0944-c58c-a62a-b5f7-e040c1b4c097}">
+        <p14:section name="정리" id="{8709b45a-c8fa-39be-3f2e-89e940154ca7}">
           <p14:sldIdLst>
             <p14:sldId id="268"/>
           </p14:sldIdLst>
         </p14:section>
-        <p14:section name="보충" id="{71525e71-9f61-b1a6-b43f-58d54c1a14f4}">
+        <p14:section name="보충" id="{c16a79d7-f9d3-e1f8-9dc3-3116d829c01a}">
           <p14:sldIdLst>
             <p14:sldId id="269"/>
           </p14:sldIdLst>
